--- a/ارائه-منتورینگ-گروهی.pptx
+++ b/ارائه-منتورینگ-گروهی.pptx
@@ -5428,7 +5428,7 @@
         </p:nvSpPr>
         <p:spPr>
           <a:xfrm>
-            <a:off x="8698687" y="5285232"/>
+            <a:off x="8698687" y="5047488"/>
             <a:ext cx="2926080" cy="15875"/>
           </a:xfrm>
           <a:prstGeom prst="rect">
@@ -5472,8 +5472,8 @@
         </p:nvSpPr>
         <p:spPr>
           <a:xfrm>
-            <a:off x="5589727" y="5486400"/>
-            <a:ext cx="6035040" cy="822960"/>
+            <a:off x="5589727" y="5230368"/>
+            <a:ext cx="6035040" cy="566928"/>
           </a:xfrm>
           <a:prstGeom prst="rect">
             <a:avLst/>
@@ -5488,7 +5488,7 @@
           <a:p>
             <a:pPr rtl="1" algn="r">
               <a:lnSpc>
-                <a:spcPct val="120000"/>
+                <a:spcPct val="115000"/>
               </a:lnSpc>
               <a:spcBef>
                 <a:spcPts val="0"/>
@@ -5506,10 +5506,68 @@
                 <a:cs typeface="IRANSans"/>
                 <a:ea typeface="IRANSans"/>
               </a:rPr>
+              <a:t>تهیه و تنظیم:  </a:t>
+            </a:r>
+            <a:r>
+              <a:rPr sz="1900" b="1">
+                <a:solidFill>
+                  <a:srgbClr val="FFFFFF"/>
+                </a:solidFill>
+                <a:latin typeface="IRANSans"/>
+                <a:cs typeface="IRANSans"/>
+                <a:ea typeface="IRANSans"/>
+              </a:rPr>
+              <a:t>وحید مجیدی</a:t>
+            </a:r>
+          </a:p>
+        </p:txBody>
+      </p:sp>
+      <p:sp>
+        <p:nvSpPr>
+          <p:cNvPr id="9" name="TextBox 8"/>
+          <p:cNvSpPr txBox="1"/>
+          <p:nvPr/>
+        </p:nvSpPr>
+        <p:spPr>
+          <a:xfrm>
+            <a:off x="5589727" y="5760720"/>
+            <a:ext cx="6035040" cy="365760"/>
+          </a:xfrm>
+          <a:prstGeom prst="rect">
+            <a:avLst/>
+          </a:prstGeom>
+          <a:noFill/>
+        </p:spPr>
+        <p:txBody>
+          <a:bodyPr wrap="square" lIns="36576" rIns="36576" tIns="0" bIns="0" anchor="t">
+            <a:spAutoFit/>
+          </a:bodyPr>
+          <a:lstStyle/>
+          <a:p>
+            <a:pPr rtl="1" algn="r">
+              <a:lnSpc>
+                <a:spcPct val="115000"/>
+              </a:lnSpc>
+              <a:spcBef>
+                <a:spcPts val="0"/>
+              </a:spcBef>
+              <a:spcAft>
+                <a:spcPts val="0"/>
+              </a:spcAft>
+            </a:pPr>
+            <a:r>
+              <a:rPr sz="1400" b="0">
+                <a:solidFill>
+                  <a:srgbClr val="62B6CB"/>
+                </a:solidFill>
+                <a:latin typeface="IRANSans"/>
+                <a:cs typeface="IRANSans"/>
+                <a:ea typeface="IRANSans"/>
+              </a:rPr>
               <a:t>تاریخ:  </a:t>
             </a:r>
             <a:r>
-              <a:rPr sz="1550" b="1">
+              <a:rPr sz="1400" b="1">
                 <a:solidFill>
                   <a:srgbClr val="FFFFFF"/>
                 </a:solidFill>
@@ -5520,7 +5578,7 @@
               <a:t>[تاریخ]</a:t>
             </a:r>
             <a:r>
-              <a:rPr sz="1550" b="0">
+              <a:rPr sz="1400" b="0">
                 <a:solidFill>
                   <a:srgbClr val="62B6CB"/>
                 </a:solidFill>
@@ -5528,10 +5586,103 @@
                 <a:cs typeface="IRANSans"/>
                 <a:ea typeface="IRANSans"/>
               </a:rPr>
-              <a:t>        تسهیل‌گر:  </a:t>
-            </a:r>
-            <a:r>
-              <a:rPr sz="1550" b="1">
+              <a:t>        </a:t>
+            </a:r>
+            <a:r>
+              <a:rPr sz="1400" b="0">
+                <a:solidFill>
+                  <a:srgbClr val="62B6CB"/>
+                </a:solidFill>
+                <a:latin typeface="IRANSans"/>
+                <a:cs typeface="IRANSans"/>
+                <a:ea typeface="IRANSans"/>
+              </a:rPr>
+              <a:t>[نام واحد / سازمان]</a:t>
+            </a:r>
+          </a:p>
+        </p:txBody>
+      </p:sp>
+      <p:sp>
+        <p:nvSpPr>
+          <p:cNvPr id="10" name="Rounded Rectangle 9"/>
+          <p:cNvSpPr/>
+          <p:nvPr/>
+        </p:nvSpPr>
+        <p:spPr>
+          <a:xfrm>
+            <a:off x="9229039" y="6181344"/>
+            <a:ext cx="2395728" cy="420624"/>
+          </a:xfrm>
+          <a:prstGeom prst="roundRect">
+            <a:avLst>
+              <a:gd name="adj" fmla="val 22000"/>
+            </a:avLst>
+          </a:prstGeom>
+          <a:solidFill>
+            <a:srgbClr val="FF6B35"/>
+          </a:solidFill>
+          <a:ln>
+            <a:noFill/>
+          </a:ln>
+          <a:effectLst/>
+        </p:spPr>
+        <p:style>
+          <a:lnRef idx="1">
+            <a:schemeClr val="accent1"/>
+          </a:lnRef>
+          <a:fillRef idx="3">
+            <a:schemeClr val="accent1"/>
+          </a:fillRef>
+          <a:effectRef idx="2">
+            <a:schemeClr val="accent1"/>
+          </a:effectRef>
+          <a:fontRef idx="minor">
+            <a:schemeClr val="lt1"/>
+          </a:fontRef>
+        </p:style>
+        <p:txBody>
+          <a:bodyPr rtlCol="0" anchor="ctr" wrap="square"/>
+          <a:lstStyle/>
+          <a:p>
+            <a:pPr algn="ctr"/>
+          </a:p>
+        </p:txBody>
+      </p:sp>
+      <p:sp>
+        <p:nvSpPr>
+          <p:cNvPr id="11" name="TextBox 10"/>
+          <p:cNvSpPr txBox="1"/>
+          <p:nvPr/>
+        </p:nvSpPr>
+        <p:spPr>
+          <a:xfrm>
+            <a:off x="9229039" y="6181344"/>
+            <a:ext cx="2395728" cy="420624"/>
+          </a:xfrm>
+          <a:prstGeom prst="rect">
+            <a:avLst/>
+          </a:prstGeom>
+          <a:noFill/>
+        </p:spPr>
+        <p:txBody>
+          <a:bodyPr wrap="square" lIns="36576" rIns="36576" tIns="0" bIns="0" anchor="ctr">
+            <a:spAutoFit/>
+          </a:bodyPr>
+          <a:lstStyle/>
+          <a:p>
+            <a:pPr rtl="1" algn="ctr">
+              <a:lnSpc>
+                <a:spcPct val="100000"/>
+              </a:lnSpc>
+              <a:spcBef>
+                <a:spcPts val="0"/>
+              </a:spcBef>
+              <a:spcAft>
+                <a:spcPts val="0"/>
+              </a:spcAft>
+            </a:pPr>
+            <a:r>
+              <a:rPr sz="1500" b="1">
                 <a:solidFill>
                   <a:srgbClr val="FFFFFF"/>
                 </a:solidFill>
@@ -5539,31 +5690,7 @@
                 <a:cs typeface="IRANSans"/>
                 <a:ea typeface="IRANSans"/>
               </a:rPr>
-              <a:t>[نام تسهیل‌گر]</a:t>
-            </a:r>
-          </a:p>
-          <a:p>
-            <a:pPr rtl="1" algn="r">
-              <a:lnSpc>
-                <a:spcPct val="120000"/>
-              </a:lnSpc>
-              <a:spcBef>
-                <a:spcPts val="500"/>
-              </a:spcBef>
-              <a:spcAft>
-                <a:spcPts val="0"/>
-              </a:spcAft>
-            </a:pPr>
-            <a:r>
-              <a:rPr sz="1300" b="0">
-                <a:solidFill>
-                  <a:srgbClr val="62B6CB"/>
-                </a:solidFill>
-                <a:latin typeface="IRANSans"/>
-                <a:cs typeface="IRANSans"/>
-                <a:ea typeface="IRANSans"/>
-              </a:rPr>
-              <a:t>[نام واحد / سازمان]</a:t>
+              <a:t>www.coachroom.ir</a:t>
             </a:r>
           </a:p>
         </p:txBody>
@@ -25936,6 +26063,75 @@
                 <a:ea typeface="IRANSans"/>
               </a:rPr>
               <a:t>بهترین زمان برای شروع، الان است.</a:t>
+            </a:r>
+          </a:p>
+        </p:txBody>
+      </p:sp>
+      <p:sp>
+        <p:nvSpPr>
+          <p:cNvPr id="20" name="TextBox 19"/>
+          <p:cNvSpPr txBox="1"/>
+          <p:nvPr/>
+        </p:nvSpPr>
+        <p:spPr>
+          <a:xfrm>
+            <a:off x="566928" y="6272784"/>
+            <a:ext cx="11057839" cy="365760"/>
+          </a:xfrm>
+          <a:prstGeom prst="rect">
+            <a:avLst/>
+          </a:prstGeom>
+          <a:noFill/>
+        </p:spPr>
+        <p:txBody>
+          <a:bodyPr wrap="square" lIns="36576" rIns="36576" tIns="0" bIns="0" anchor="t">
+            <a:spAutoFit/>
+          </a:bodyPr>
+          <a:lstStyle/>
+          <a:p>
+            <a:pPr rtl="1" algn="ctr">
+              <a:lnSpc>
+                <a:spcPct val="100000"/>
+              </a:lnSpc>
+              <a:spcBef>
+                <a:spcPts val="0"/>
+              </a:spcBef>
+              <a:spcAft>
+                <a:spcPts val="0"/>
+              </a:spcAft>
+            </a:pPr>
+            <a:r>
+              <a:rPr sz="1400" b="1">
+                <a:solidFill>
+                  <a:srgbClr val="FFFFFF"/>
+                </a:solidFill>
+                <a:latin typeface="IRANSans"/>
+                <a:cs typeface="IRANSans"/>
+                <a:ea typeface="IRANSans"/>
+              </a:rPr>
+              <a:t>وحید مجیدی</a:t>
+            </a:r>
+            <a:r>
+              <a:rPr sz="1400" b="0">
+                <a:solidFill>
+                  <a:srgbClr val="FF6B35"/>
+                </a:solidFill>
+                <a:latin typeface="IRANSans"/>
+                <a:cs typeface="IRANSans"/>
+                <a:ea typeface="IRANSans"/>
+              </a:rPr>
+              <a:t>     |     </a:t>
+            </a:r>
+            <a:r>
+              <a:rPr sz="1400" b="1">
+                <a:solidFill>
+                  <a:srgbClr val="FF6B35"/>
+                </a:solidFill>
+                <a:latin typeface="IRANSans"/>
+                <a:cs typeface="IRANSans"/>
+                <a:ea typeface="IRANSans"/>
+              </a:rPr>
+              <a:t>www.coachroom.ir</a:t>
             </a:r>
           </a:p>
         </p:txBody>

--- a/ارائه-منتورینگ-گروهی.pptx
+++ b/ارائه-منتورینگ-گروهی.pptx
@@ -32114,7 +32114,7 @@
                 <a:cs typeface="IRANSans"/>
                 <a:ea typeface="IRANSans"/>
               </a:rPr>
-              <a:t>۹۰٪ روی کلاس و دوره</a:t>
+              <a:t>عمدتاً روی کلاس و دوره</a:t>
             </a:r>
           </a:p>
         </p:txBody>
@@ -32172,7 +32172,7 @@
                 <a:cs typeface="IRANSans"/>
                 <a:ea typeface="IRANSans"/>
               </a:rPr>
-              <a:t>۹۰٪</a:t>
+              <a:t>بخش عمده بودجه</a:t>
             </a:r>
             <a:r>
               <a:rPr sz="1550" b="0">
@@ -32183,7 +32183,7 @@
                 <a:cs typeface="IRANSans"/>
                 <a:ea typeface="IRANSans"/>
               </a:rPr>
-              <a:t> بودجه، روی </a:t>
+              <a:t>، روی </a:t>
             </a:r>
             <a:r>
               <a:rPr sz="1550" b="1">
